--- a/assets/pptx/catalog-620.pptx
+++ b/assets/pptx/catalog-620.pptx
@@ -3423,7 +3423,7 @@
                 <a:ea typeface="Ebrima"/>
                 <a:cs typeface="Ebrima"/>
               </a:rPr>
-              <a:t>ኢየሱስ የሚመስልህ የለም (2x)</a:t>
+              <a:t>ኢየሱስ የሚመስልህ የለም 2x</a:t>
             </a:r>
           </a:p>
         </p:txBody>
@@ -3665,7 +3665,7 @@
                 <a:ea typeface="Ebrima"/>
                 <a:cs typeface="Ebrima"/>
               </a:rPr>
-              <a:t>ኢየሱስ የሚመስልህ የለም (2x)</a:t>
+              <a:t>ኢየሱስ የሚመስልህ የለም 2x</a:t>
             </a:r>
           </a:p>
         </p:txBody>
@@ -3907,7 +3907,7 @@
                 <a:ea typeface="Ebrima"/>
                 <a:cs typeface="Ebrima"/>
               </a:rPr>
-              <a:t>ኢየሱስ የሚመስልህ የለም (2x)</a:t>
+              <a:t>ኢየሱስ የሚመስልህ የለም 2x</a:t>
             </a:r>
           </a:p>
         </p:txBody>
@@ -4149,7 +4149,7 @@
                 <a:ea typeface="Ebrima"/>
                 <a:cs typeface="Ebrima"/>
               </a:rPr>
-              <a:t>ኢየሱስ የሚመስልህ የለም (2x)</a:t>
+              <a:t>ኢየሱስ የሚመስልህ የለም 2x</a:t>
             </a:r>
           </a:p>
         </p:txBody>
